--- a/LectureSlides/04_SamplingAndSimulation.pptx
+++ b/LectureSlides/04_SamplingAndSimulation.pptx
@@ -3744,7 +3744,7 @@
             <a:pPr algn="ctr"/>
             <a:r>
               <a:rPr lang="en-US" sz="1100" dirty="0"/>
-              <a:t>Copyright 2018, 2019, 2020, 2021, 2022, 2023 2024, Stephen F Elston. All rights reserved</a:t>
+              <a:t>Copyright 2018, 2019, 2020, 2021, 2022, 2023 2024, 2026, Stephen F Elston. All rights reserved</a:t>
             </a:r>
             <a:r>
               <a:rPr lang="en-US" dirty="0"/>
@@ -11800,13 +11800,8 @@
             <a:pPr algn="ctr"/>
             <a:r>
               <a:rPr lang="en-US" b="0" cap="none" dirty="0"/>
-              <a:t>The Sampling </a:t>
-            </a:r>
-            <a:r>
-              <a:rPr lang="en-US" b="0" cap="none" dirty="0" err="1"/>
-              <a:t>Dispribution</a:t>
-            </a:r>
-            <a:endParaRPr lang="en-US" b="0" cap="none" dirty="0"/>
+              <a:t>The Sampling Distribution</a:t>
+            </a:r>
           </a:p>
         </p:txBody>
       </p:sp>
